--- a/ejemplos/Informe_Demo_KPIs.pptx
+++ b/ejemplos/Informe_Demo_KPIs.pptx
@@ -144,9 +144,9 @@
           </c:spPr>
           <c:cat>
             <c:strRef>
-              <c:f>Sheet1!$A$2:$A$5</c:f>
+              <c:f>Sheet1!$A$2:$A$6</c:f>
               <c:strCache>
-                <c:ptCount val="4"/>
+                <c:ptCount val="5"/>
                 <c:pt idx="0">
                   <c:v>Abr-26</c:v>
                 </c:pt>
@@ -158,27 +158,33 @@
                 </c:pt>
                 <c:pt idx="3">
                   <c:v>Jul-26</c:v>
+                </c:pt>
+                <c:pt idx="4">
+                  <c:v>Ago-26</c:v>
                 </c:pt>
               </c:strCache>
             </c:strRef>
           </c:cat>
           <c:val>
             <c:numRef>
-              <c:f>Sheet1!$B$2:$B$5</c:f>
+              <c:f>Sheet1!$B$2:$B$6</c:f>
               <c:numCache>
                 <c:formatCode>General</c:formatCode>
-                <c:ptCount val="4"/>
+                <c:ptCount val="5"/>
                 <c:pt idx="0">
-                  <c:v>185</c:v>
+                  <c:v>25</c:v>
                 </c:pt>
                 <c:pt idx="1">
-                  <c:v>203</c:v>
+                  <c:v>24</c:v>
                 </c:pt>
                 <c:pt idx="2">
-                  <c:v>250</c:v>
+                  <c:v>50</c:v>
                 </c:pt>
                 <c:pt idx="3">
-                  <c:v>286</c:v>
+                  <c:v>175</c:v>
+                </c:pt>
+                <c:pt idx="4">
+                  <c:v>77</c:v>
                 </c:pt>
               </c:numCache>
             </c:numRef>
@@ -210,9 +216,9 @@
           </c:spPr>
           <c:cat>
             <c:strRef>
-              <c:f>Sheet1!$A$2:$A$5</c:f>
+              <c:f>Sheet1!$A$2:$A$6</c:f>
               <c:strCache>
-                <c:ptCount val="4"/>
+                <c:ptCount val="5"/>
                 <c:pt idx="0">
                   <c:v>Abr-26</c:v>
                 </c:pt>
@@ -224,27 +230,33 @@
                 </c:pt>
                 <c:pt idx="3">
                   <c:v>Jul-26</c:v>
+                </c:pt>
+                <c:pt idx="4">
+                  <c:v>Ago-26</c:v>
                 </c:pt>
               </c:strCache>
             </c:strRef>
           </c:cat>
           <c:val>
             <c:numRef>
-              <c:f>Sheet1!$C$2:$C$5</c:f>
+              <c:f>Sheet1!$C$2:$C$6</c:f>
               <c:numCache>
                 <c:formatCode>General</c:formatCode>
-                <c:ptCount val="4"/>
+                <c:ptCount val="5"/>
                 <c:pt idx="0">
-                  <c:v>82</c:v>
+                  <c:v>13</c:v>
                 </c:pt>
                 <c:pt idx="1">
-                  <c:v>149</c:v>
+                  <c:v>218</c:v>
                 </c:pt>
                 <c:pt idx="2">
-                  <c:v>96</c:v>
+                  <c:v>62</c:v>
                 </c:pt>
                 <c:pt idx="3">
-                  <c:v>101</c:v>
+                  <c:v>29</c:v>
+                </c:pt>
+                <c:pt idx="4">
+                  <c:v>23</c:v>
                 </c:pt>
               </c:numCache>
             </c:numRef>
@@ -382,9 +394,9 @@
           </c:spPr>
           <c:cat>
             <c:strRef>
-              <c:f>Sheet1!$A$2:$A$5</c:f>
+              <c:f>Sheet1!$A$2:$A$6</c:f>
               <c:strCache>
-                <c:ptCount val="4"/>
+                <c:ptCount val="5"/>
                 <c:pt idx="0">
                   <c:v>Abr-26</c:v>
                 </c:pt>
@@ -396,27 +408,33 @@
                 </c:pt>
                 <c:pt idx="3">
                   <c:v>Jul-26</c:v>
+                </c:pt>
+                <c:pt idx="4">
+                  <c:v>Ago-26</c:v>
                 </c:pt>
               </c:strCache>
             </c:strRef>
           </c:cat>
           <c:val>
             <c:numRef>
-              <c:f>Sheet1!$B$2:$B$5</c:f>
+              <c:f>Sheet1!$B$2:$B$6</c:f>
               <c:numCache>
                 <c:formatCode>General</c:formatCode>
-                <c:ptCount val="4"/>
+                <c:ptCount val="5"/>
                 <c:pt idx="0">
-                  <c:v>1510.34132</c:v>
+                  <c:v>198.57949</c:v>
                 </c:pt>
                 <c:pt idx="1">
-                  <c:v>1515.2431100000001</c:v>
+                  <c:v>134.21804</c:v>
                 </c:pt>
                 <c:pt idx="2">
-                  <c:v>1941.6483600000001</c:v>
+                  <c:v>349.05276000000003</c:v>
                 </c:pt>
                 <c:pt idx="3">
-                  <c:v>2203.7015699999997</c:v>
+                  <c:v>1340.0281</c:v>
+                </c:pt>
+                <c:pt idx="4">
+                  <c:v>576.08334</c:v>
                 </c:pt>
               </c:numCache>
             </c:numRef>
@@ -448,9 +466,9 @@
           </c:spPr>
           <c:cat>
             <c:strRef>
-              <c:f>Sheet1!$A$2:$A$5</c:f>
+              <c:f>Sheet1!$A$2:$A$6</c:f>
               <c:strCache>
-                <c:ptCount val="4"/>
+                <c:ptCount val="5"/>
                 <c:pt idx="0">
                   <c:v>Abr-26</c:v>
                 </c:pt>
@@ -462,27 +480,33 @@
                 </c:pt>
                 <c:pt idx="3">
                   <c:v>Jul-26</c:v>
+                </c:pt>
+                <c:pt idx="4">
+                  <c:v>Ago-26</c:v>
                 </c:pt>
               </c:strCache>
             </c:strRef>
           </c:cat>
           <c:val>
             <c:numRef>
-              <c:f>Sheet1!$C$2:$C$5</c:f>
+              <c:f>Sheet1!$C$2:$C$6</c:f>
               <c:numCache>
                 <c:formatCode>General</c:formatCode>
-                <c:ptCount val="4"/>
+                <c:ptCount val="5"/>
                 <c:pt idx="0">
-                  <c:v>1131.43658</c:v>
+                  <c:v>176.62654999999998</c:v>
                 </c:pt>
                 <c:pt idx="1">
-                  <c:v>2020.06299</c:v>
+                  <c:v>3048.81808</c:v>
                 </c:pt>
                 <c:pt idx="2">
-                  <c:v>1188.58912</c:v>
+                  <c:v>915.6284300000001</c:v>
                 </c:pt>
                 <c:pt idx="3">
-                  <c:v>1406.47002</c:v>
+                  <c:v>340.12628</c:v>
+                </c:pt>
+                <c:pt idx="4">
+                  <c:v>301.11128</c:v>
                 </c:pt>
               </c:numCache>
             </c:numRef>
@@ -629,9 +653,9 @@
           </c:marker>
           <c:cat>
             <c:strRef>
-              <c:f>Sheet1!$A$2:$A$5</c:f>
+              <c:f>Sheet1!$A$2:$A$6</c:f>
               <c:strCache>
-                <c:ptCount val="4"/>
+                <c:ptCount val="5"/>
                 <c:pt idx="0">
                   <c:v>Abr-26</c:v>
                 </c:pt>
@@ -643,27 +667,33 @@
                 </c:pt>
                 <c:pt idx="3">
                   <c:v>Jul-26</c:v>
+                </c:pt>
+                <c:pt idx="4">
+                  <c:v>Ago-26</c:v>
                 </c:pt>
               </c:strCache>
             </c:strRef>
           </c:cat>
           <c:val>
             <c:numRef>
-              <c:f>Sheet1!$B$2:$B$5</c:f>
+              <c:f>Sheet1!$B$2:$B$6</c:f>
               <c:numCache>
                 <c:formatCode>General</c:formatCode>
-                <c:ptCount val="4"/>
+                <c:ptCount val="5"/>
                 <c:pt idx="0">
+                  <c:v>2.8</c:v>
+                </c:pt>
+                <c:pt idx="1">
                   <c:v>3.6</c:v>
                 </c:pt>
-                <c:pt idx="1">
-                  <c:v>4.1</c:v>
-                </c:pt>
                 <c:pt idx="2">
-                  <c:v>4.2</c:v>
+                  <c:v>2.4</c:v>
                 </c:pt>
                 <c:pt idx="3">
-                  <c:v>5.0</c:v>
+                  <c:v>3.6</c:v>
+                </c:pt>
+                <c:pt idx="4">
+                  <c:v>4.7</c:v>
                 </c:pt>
               </c:numCache>
             </c:numRef>
@@ -705,9 +735,9 @@
           </c:marker>
           <c:cat>
             <c:strRef>
-              <c:f>Sheet1!$A$2:$A$5</c:f>
+              <c:f>Sheet1!$A$2:$A$6</c:f>
               <c:strCache>
-                <c:ptCount val="4"/>
+                <c:ptCount val="5"/>
                 <c:pt idx="0">
                   <c:v>Abr-26</c:v>
                 </c:pt>
@@ -719,27 +749,33 @@
                 </c:pt>
                 <c:pt idx="3">
                   <c:v>Jul-26</c:v>
+                </c:pt>
+                <c:pt idx="4">
+                  <c:v>Ago-26</c:v>
                 </c:pt>
               </c:strCache>
             </c:strRef>
           </c:cat>
           <c:val>
             <c:numRef>
-              <c:f>Sheet1!$C$2:$C$5</c:f>
+              <c:f>Sheet1!$C$2:$C$6</c:f>
               <c:numCache>
                 <c:formatCode>General</c:formatCode>
-                <c:ptCount val="4"/>
+                <c:ptCount val="5"/>
                 <c:pt idx="0">
-                  <c:v>3.0</c:v>
+                  <c:v>0.6</c:v>
                 </c:pt>
                 <c:pt idx="1">
-                  <c:v>3.8</c:v>
+                  <c:v>2.5</c:v>
                 </c:pt>
                 <c:pt idx="2">
-                  <c:v>3.8</c:v>
+                  <c:v>2.0</c:v>
                 </c:pt>
                 <c:pt idx="3">
-                  <c:v>4.2</c:v>
+                  <c:v>3.5</c:v>
+                </c:pt>
+                <c:pt idx="4">
+                  <c:v>1.6</c:v>
                 </c:pt>
               </c:numCache>
             </c:numRef>
@@ -892,9 +928,9 @@
           </c:marker>
           <c:cat>
             <c:strRef>
-              <c:f>Sheet1!$A$2:$A$5</c:f>
+              <c:f>Sheet1!$A$2:$A$6</c:f>
               <c:strCache>
-                <c:ptCount val="4"/>
+                <c:ptCount val="5"/>
                 <c:pt idx="0">
                   <c:v>Abr-26</c:v>
                 </c:pt>
@@ -906,27 +942,33 @@
                 </c:pt>
                 <c:pt idx="3">
                   <c:v>Jul-26</c:v>
+                </c:pt>
+                <c:pt idx="4">
+                  <c:v>Ago-26</c:v>
                 </c:pt>
               </c:strCache>
             </c:strRef>
           </c:cat>
           <c:val>
             <c:numRef>
-              <c:f>Sheet1!$B$2:$B$5</c:f>
+              <c:f>Sheet1!$B$2:$B$6</c:f>
               <c:numCache>
                 <c:formatCode>General</c:formatCode>
-                <c:ptCount val="4"/>
+                <c:ptCount val="5"/>
                 <c:pt idx="0">
-                  <c:v>0.03243</c:v>
+                  <c:v>0.0625</c:v>
                 </c:pt>
                 <c:pt idx="1">
-                  <c:v>0.01478</c:v>
+                  <c:v>0.00791</c:v>
                 </c:pt>
                 <c:pt idx="2">
-                  <c:v>0.008</c:v>
+                  <c:v>0.00775</c:v>
                 </c:pt>
                 <c:pt idx="3">
-                  <c:v>0.00699</c:v>
+                  <c:v>0.00901</c:v>
+                </c:pt>
+                <c:pt idx="4">
+                  <c:v>0.00735</c:v>
                 </c:pt>
               </c:numCache>
             </c:numRef>
@@ -968,9 +1010,9 @@
           </c:marker>
           <c:cat>
             <c:strRef>
-              <c:f>Sheet1!$A$2:$A$5</c:f>
+              <c:f>Sheet1!$A$2:$A$6</c:f>
               <c:strCache>
-                <c:ptCount val="4"/>
+                <c:ptCount val="5"/>
                 <c:pt idx="0">
                   <c:v>Abr-26</c:v>
                 </c:pt>
@@ -982,27 +1024,33 @@
                 </c:pt>
                 <c:pt idx="3">
                   <c:v>Jul-26</c:v>
+                </c:pt>
+                <c:pt idx="4">
+                  <c:v>Ago-26</c:v>
                 </c:pt>
               </c:strCache>
             </c:strRef>
           </c:cat>
           <c:val>
             <c:numRef>
-              <c:f>Sheet1!$C$2:$C$5</c:f>
+              <c:f>Sheet1!$C$2:$C$6</c:f>
               <c:numCache>
                 <c:formatCode>General</c:formatCode>
-                <c:ptCount val="4"/>
+                <c:ptCount val="5"/>
                 <c:pt idx="0">
-                  <c:v>0.03243</c:v>
+                  <c:v>0.10417</c:v>
                 </c:pt>
                 <c:pt idx="1">
-                  <c:v>0.02463</c:v>
+                  <c:v>0.02372</c:v>
                 </c:pt>
                 <c:pt idx="2">
-                  <c:v>0.008</c:v>
+                  <c:v>0.0155</c:v>
                 </c:pt>
                 <c:pt idx="3">
-                  <c:v>0.01748</c:v>
+                  <c:v>0.00901</c:v>
+                </c:pt>
+                <c:pt idx="4">
+                  <c:v>0.01471</c:v>
                 </c:pt>
               </c:numCache>
             </c:numRef>
@@ -1045,9 +1093,9 @@
           </c:marker>
           <c:cat>
             <c:strRef>
-              <c:f>Sheet1!$A$2:$A$5</c:f>
+              <c:f>Sheet1!$A$2:$A$6</c:f>
               <c:strCache>
-                <c:ptCount val="4"/>
+                <c:ptCount val="5"/>
                 <c:pt idx="0">
                   <c:v>Abr-26</c:v>
                 </c:pt>
@@ -1059,16 +1107,19 @@
                 </c:pt>
                 <c:pt idx="3">
                   <c:v>Jul-26</c:v>
+                </c:pt>
+                <c:pt idx="4">
+                  <c:v>Ago-26</c:v>
                 </c:pt>
               </c:strCache>
             </c:strRef>
           </c:cat>
           <c:val>
             <c:numRef>
-              <c:f>Sheet1!$D$2:$D$5</c:f>
+              <c:f>Sheet1!$D$2:$D$6</c:f>
               <c:numCache>
                 <c:formatCode>General</c:formatCode>
-                <c:ptCount val="4"/>
+                <c:ptCount val="5"/>
                 <c:pt idx="0">
                   <c:v>0.01</c:v>
                 </c:pt>
@@ -1079,6 +1130,9 @@
                   <c:v>0.01</c:v>
                 </c:pt>
                 <c:pt idx="3">
+                  <c:v>0.01</c:v>
+                </c:pt>
+                <c:pt idx="4">
                   <c:v>0.01</c:v>
                 </c:pt>
               </c:numCache>
@@ -1223,9 +1277,9 @@
           </c:spPr>
           <c:cat>
             <c:strRef>
-              <c:f>Sheet1!$A$2:$A$5</c:f>
+              <c:f>Sheet1!$A$2:$A$6</c:f>
               <c:strCache>
-                <c:ptCount val="4"/>
+                <c:ptCount val="5"/>
                 <c:pt idx="0">
                   <c:v>Abr-26</c:v>
                 </c:pt>
@@ -1237,27 +1291,33 @@
                 </c:pt>
                 <c:pt idx="3">
                   <c:v>Jul-26</c:v>
+                </c:pt>
+                <c:pt idx="4">
+                  <c:v>Ago-26</c:v>
                 </c:pt>
               </c:strCache>
             </c:strRef>
           </c:cat>
           <c:val>
             <c:numRef>
-              <c:f>Sheet1!$B$2:$B$5</c:f>
+              <c:f>Sheet1!$B$2:$B$6</c:f>
               <c:numCache>
                 <c:formatCode>General</c:formatCode>
-                <c:ptCount val="4"/>
+                <c:ptCount val="5"/>
                 <c:pt idx="0">
-                  <c:v>4.0</c:v>
+                  <c:v>0.5</c:v>
                 </c:pt>
                 <c:pt idx="1">
-                  <c:v>4.4</c:v>
+                  <c:v>0.5</c:v>
                 </c:pt>
                 <c:pt idx="2">
-                  <c:v>5.4</c:v>
+                  <c:v>1.1</c:v>
                 </c:pt>
                 <c:pt idx="3">
-                  <c:v>6.2</c:v>
+                  <c:v>3.8</c:v>
+                </c:pt>
+                <c:pt idx="4">
+                  <c:v>1.7</c:v>
                 </c:pt>
               </c:numCache>
             </c:numRef>
@@ -1289,9 +1349,9 @@
           </c:spPr>
           <c:cat>
             <c:strRef>
-              <c:f>Sheet1!$A$2:$A$5</c:f>
+              <c:f>Sheet1!$A$2:$A$6</c:f>
               <c:strCache>
-                <c:ptCount val="4"/>
+                <c:ptCount val="5"/>
                 <c:pt idx="0">
                   <c:v>Abr-26</c:v>
                 </c:pt>
@@ -1303,27 +1363,33 @@
                 </c:pt>
                 <c:pt idx="3">
                   <c:v>Jul-26</c:v>
+                </c:pt>
+                <c:pt idx="4">
+                  <c:v>Ago-26</c:v>
                 </c:pt>
               </c:strCache>
             </c:strRef>
           </c:cat>
           <c:val>
             <c:numRef>
-              <c:f>Sheet1!$C$2:$C$5</c:f>
+              <c:f>Sheet1!$C$2:$C$6</c:f>
               <c:numCache>
                 <c:formatCode>General</c:formatCode>
-                <c:ptCount val="4"/>
+                <c:ptCount val="5"/>
                 <c:pt idx="0">
-                  <c:v>5.5</c:v>
+                  <c:v>0.9</c:v>
                 </c:pt>
                 <c:pt idx="1">
-                  <c:v>9.9</c:v>
+                  <c:v>14.5</c:v>
                 </c:pt>
                 <c:pt idx="2">
-                  <c:v>6.4</c:v>
+                  <c:v>4.1</c:v>
                 </c:pt>
                 <c:pt idx="3">
-                  <c:v>6.7</c:v>
+                  <c:v>1.9</c:v>
+                </c:pt>
+                <c:pt idx="4">
+                  <c:v>1.5</c:v>
                 </c:pt>
               </c:numCache>
             </c:numRef>
@@ -4492,7 +4558,7 @@
                 </a:solidFill>
                 <a:latin typeface="Calibri"/>
               </a:rPr>
-              <a:t>Pagos Masivos y CTS · Jul-26 · Comparativo del periodo</a:t>
+              <a:t>Pagos Masivos y CTS · Ago-26 · Comparativo del periodo</a:t>
             </a:r>
           </a:p>
         </p:txBody>
@@ -4679,7 +4745,7 @@
                 </a:solidFill>
                 <a:latin typeface="Calibri"/>
               </a:rPr>
-              <a:t>Jul-26: 286 pagos de convenio (+36 vs. mes anterior). [Dato de ejemplo generado al azar.]</a:t>
+              <a:t>Ago-26: 77 pagos de convenio (-98 vs. mes anterior). [Dato de ejemplo generado al azar.]</a:t>
             </a:r>
           </a:p>
         </p:txBody>
@@ -4866,7 +4932,7 @@
                 </a:solidFill>
                 <a:latin typeface="Calibri"/>
               </a:rPr>
-              <a:t>Jul-26: S/ 3,610,172 movilizados entre pagos de convenio y CTS, 100% trazable en el sistema.</a:t>
+              <a:t>Ago-26: S/ 908,196 movilizados entre pagos de convenio y CTS, 100% trazable en el sistema.</a:t>
             </a:r>
           </a:p>
         </p:txBody>
@@ -5053,7 +5119,7 @@
                 </a:solidFill>
                 <a:latin typeface="Calibri"/>
               </a:rPr>
-              <a:t>Jul-26: cada persona atendió ~5 transacciones por día trabajado. La brecha con la línea naranja son días sin actividad.</a:t>
+              <a:t>Ago-26: cada persona atendió ~5 transacciones por día trabajado. La brecha con la línea naranja son días sin actividad.</a:t>
             </a:r>
           </a:p>
         </p:txBody>
@@ -5240,7 +5306,7 @@
                 </a:solidFill>
                 <a:latin typeface="Calibri"/>
               </a:rPr>
-              <a:t>Jul-26: 0.70 de cada 100 pagos se revirtió por error propio — 2 errores sobre 286 pagos hechos.</a:t>
+              <a:t>Ago-26: 0.73 de cada 100 pagos se revirtió por error propio — 1 errores sobre 77 pagos hechos.</a:t>
             </a:r>
           </a:p>
         </p:txBody>
@@ -5297,7 +5363,7 @@
                 </a:solidFill>
                 <a:latin typeface="Calibri"/>
               </a:rPr>
-              <a:t>1.03x</a:t>
+              <a:t>1.61x</a:t>
             </a:r>
           </a:p>
           <a:p>
@@ -5378,7 +5444,7 @@
                 </a:solidFill>
                 <a:latin typeface="Calibri"/>
               </a:rPr>
-              <a:t>6%</a:t>
+              <a:t>12%</a:t>
             </a:r>
           </a:p>
           <a:p>
@@ -5459,7 +5525,7 @@
                 </a:solidFill>
                 <a:latin typeface="Calibri"/>
               </a:rPr>
-              <a:t>40%</a:t>
+              <a:t>100%</a:t>
             </a:r>
           </a:p>
           <a:p>
@@ -5471,7 +5537,7 @@
                 </a:solidFill>
                 <a:latin typeface="Calibri"/>
               </a:rPr>
-              <a:t>Agencias que ya usan Pago en Lote</a:t>
+              <a:t>Agencias con convenio que ya usan Pago en Lote</a:t>
             </a:r>
           </a:p>
           <a:p>
@@ -5483,7 +5549,7 @@
                 </a:solidFill>
                 <a:latin typeface="Calibri"/>
               </a:rPr>
-              <a:t>de 62 agencias en total</a:t>
+              <a:t>de 6 agencias con convenio</a:t>
             </a:r>
           </a:p>
         </p:txBody>
@@ -5540,7 +5606,7 @@
                 </a:solidFill>
                 <a:latin typeface="Calibri"/>
               </a:rPr>
-              <a:t>32%</a:t>
+              <a:t>66%</a:t>
             </a:r>
           </a:p>
           <a:p>
@@ -5564,7 +5630,7 @@
                 </a:solidFill>
                 <a:latin typeface="Calibri"/>
               </a:rPr>
-              <a:t>de 62 agencias en total</a:t>
+              <a:t>de 38 agencias</a:t>
             </a:r>
           </a:p>
         </p:txBody>
@@ -5741,7 +5807,7 @@
                 </a:solidFill>
                 <a:latin typeface="Calibri"/>
               </a:rPr>
-              <a:t>Pagos Masivos y CTS · Jul-26 · Tiempo estimado de trabajo</a:t>
+              <a:t>Pagos Masivos y CTS · Ago-26 · Tiempo estimado de trabajo</a:t>
             </a:r>
           </a:p>
         </p:txBody>
@@ -5928,7 +5994,7 @@
                 </a:solidFill>
                 <a:latin typeface="Calibri"/>
               </a:rPr>
-              <a:t>Es un estimado, no un cronómetro real: se calcula con un tiempo promedio por transacción (1.3 min por pago de convenio, 4.0 min por CTS). En Jul-26 equivale a 13 horas de trabajo, unos 1.6 días completos de una persona sola.</a:t>
+              <a:t>Es un estimado, no un cronómetro real: se calcula con un tiempo promedio por transacción (1.3 min por pago de convenio, 4.0 min por CTS). En Ago-26 equivale a 3 horas de trabajo, unos 0.4 días completos de una persona sola.</a:t>
             </a:r>
           </a:p>
         </p:txBody>
@@ -6071,7 +6137,7 @@
                 </a:solidFill>
                 <a:latin typeface="Calibri"/>
               </a:rPr>
-              <a:t>Pagos Masivos y CTS · Jul-26</a:t>
+              <a:t>Pagos Masivos y CTS · Ago-26</a:t>
             </a:r>
           </a:p>
         </p:txBody>
